--- a/output/education/2026-03-21_narrative-medicine-integrated/narrative-medicine_slides_residents.pptx
+++ b/output/education/2026-03-21_narrative-medicine-integrated/narrative-medicine_slides_residents.pptx
@@ -3134,6 +3134,7 @@
               </a:defRPr>
             </a:pPr>
             <a:r>
+              <a:rPr/>
               <a:t>デジタル時代のナラティブ・メディスン</a:t>
             </a:r>
           </a:p>
@@ -3170,6 +3171,7 @@
               </a:defRPr>
             </a:pPr>
             <a:r>
+              <a:rPr/>
               <a:t>物語の力 x 臨床思考 x デジタルツールの統合</a:t>
             </a:r>
           </a:p>
@@ -3214,7 +3216,9 @@
           <a:bodyPr rtlCol="0" anchor="ctr"/>
           <a:lstStyle/>
           <a:p>
-            <a:pPr algn="ctr"/>
+            <a:pPr algn="ctr">
+              <a:defRPr/>
+            </a:pPr>
           </a:p>
         </p:txBody>
       </p:sp>
@@ -3249,6 +3253,7 @@
               </a:defRPr>
             </a:pPr>
             <a:r>
+              <a:rPr/>
               <a:t>研修医・専攻医向け｜30分｜2026-03-21</a:t>
             </a:r>
           </a:p>
@@ -3311,6 +3316,7 @@
               </a:defRPr>
             </a:pPr>
             <a:r>
+              <a:rPr/>
               <a:t>導入の問い</a:t>
             </a:r>
           </a:p>
@@ -3355,7 +3361,9 @@
           <a:bodyPr rtlCol="0" anchor="ctr"/>
           <a:lstStyle/>
           <a:p>
-            <a:pPr algn="ctr"/>
+            <a:pPr algn="ctr">
+              <a:defRPr/>
+            </a:pPr>
           </a:p>
         </p:txBody>
       </p:sp>
@@ -3400,7 +3408,9 @@
           <a:bodyPr rtlCol="0" anchor="ctr"/>
           <a:lstStyle/>
           <a:p>
-            <a:pPr algn="ctr"/>
+            <a:pPr algn="ctr">
+              <a:defRPr/>
+            </a:pPr>
           </a:p>
         </p:txBody>
       </p:sp>
@@ -3435,10 +3445,12 @@
               </a:defRPr>
             </a:pPr>
             <a:r>
+              <a:rPr/>
               <a:t>最近診た患者さんの中で、病歴だけでは</a:t>
             </a:r>
             <a:br/>
             <a:r>
+              <a:rPr/>
               <a:t>捉えきれなかった「何か」を感じた経験はありますか？</a:t>
             </a:r>
           </a:p>
@@ -3453,7 +3465,7 @@
         <p:spPr>
           <a:xfrm>
             <a:off x="731520" y="2011680"/>
-            <a:ext cx="7315200" cy="365760"/>
+            <a:ext cx="7315200" cy="375920"/>
           </a:xfrm>
           <a:prstGeom prst="rect">
             <a:avLst/>
@@ -3475,6 +3487,7 @@
               </a:defRPr>
             </a:pPr>
             <a:r>
+              <a:rPr/>
               <a:t>この30分の後、あなたは：</a:t>
             </a:r>
           </a:p>
@@ -3512,6 +3525,7 @@
               <a:buChar char="●"/>
             </a:pPr>
             <a:r>
+              <a:rPr/>
               <a:t>ナラティブ・メディスンの理論的背景を説明できる（理解）</a:t>
             </a:r>
           </a:p>
@@ -3526,6 +3540,7 @@
               <a:buChar char="●"/>
             </a:pPr>
             <a:r>
+              <a:rPr/>
               <a:t>デジタル・ナラティブの可能性と限界を論じられる（分析）</a:t>
             </a:r>
           </a:p>
@@ -3540,6 +3555,7 @@
               <a:buChar char="●"/>
             </a:pPr>
             <a:r>
+              <a:rPr/>
               <a:t>臨床思考との統合アプローチを1つ導入する計画を立てられる（創造）</a:t>
             </a:r>
           </a:p>
@@ -3580,7 +3596,7 @@
         <p:spPr>
           <a:xfrm>
             <a:off x="731520" y="274320"/>
-            <a:ext cx="7315200" cy="457200"/>
+            <a:ext cx="7315200" cy="589279"/>
           </a:xfrm>
           <a:prstGeom prst="rect">
             <a:avLst/>
@@ -3602,6 +3618,7 @@
               </a:defRPr>
             </a:pPr>
             <a:r>
+              <a:rPr/>
               <a:t>ナラティブ・メディスンとは</a:t>
             </a:r>
           </a:p>
@@ -3615,8 +3632,8 @@
         </p:nvSpPr>
         <p:spPr>
           <a:xfrm>
-            <a:off x="731520" y="731520"/>
-            <a:ext cx="4572000" cy="274320"/>
+            <a:off x="731520" y="881887"/>
+            <a:ext cx="4572000" cy="304799"/>
           </a:xfrm>
           <a:prstGeom prst="rect">
             <a:avLst/>
@@ -3638,6 +3655,7 @@
               </a:defRPr>
             </a:pPr>
             <a:r>
+              <a:rPr/>
               <a:t>Rita Charon のフレームワーク（Columbia, 2001）</a:t>
             </a:r>
           </a:p>
@@ -4005,7 +4023,9 @@
           <a:bodyPr rtlCol="0" anchor="ctr"/>
           <a:lstStyle/>
           <a:p>
-            <a:pPr algn="ctr"/>
+            <a:pPr algn="ctr">
+              <a:defRPr/>
+            </a:pPr>
           </a:p>
         </p:txBody>
       </p:sp>
@@ -4040,10 +4060,12 @@
               </a:defRPr>
             </a:pPr>
             <a:r>
+              <a:rPr/>
               <a:t>ナラティブ・メディスン = 患者の物語を医療の中核に据えるアプローチ。</a:t>
             </a:r>
             <a:br/>
             <a:r>
+              <a:rPr/>
               <a:t>「聴く→表現する→繋がる」の3つのステップで、医師-患者関係を深める。</a:t>
             </a:r>
           </a:p>
@@ -4084,7 +4106,7 @@
         <p:spPr>
           <a:xfrm>
             <a:off x="731520" y="274320"/>
-            <a:ext cx="7315200" cy="457200"/>
+            <a:ext cx="7315200" cy="518159"/>
           </a:xfrm>
           <a:prstGeom prst="rect">
             <a:avLst/>
@@ -4106,6 +4128,7 @@
               </a:defRPr>
             </a:pPr>
             <a:r>
+              <a:rPr/>
               <a:t>ナラティブ教育の現実 — 4つの構造的障壁</a:t>
             </a:r>
           </a:p>
@@ -4119,8 +4142,8 @@
         </p:nvSpPr>
         <p:spPr>
           <a:xfrm>
-            <a:off x="731520" y="731520"/>
-            <a:ext cx="4572000" cy="274320"/>
+            <a:off x="731520" y="810767"/>
+            <a:ext cx="4572000" cy="304799"/>
           </a:xfrm>
           <a:prstGeom prst="rect">
             <a:avLst/>
@@ -4142,6 +4165,7 @@
               </a:defRPr>
             </a:pPr>
             <a:r>
+              <a:rPr/>
               <a:t>Frontiers in Medicine, 2026</a:t>
             </a:r>
           </a:p>
@@ -4188,7 +4212,9 @@
           <a:bodyPr rtlCol="0" anchor="ctr"/>
           <a:lstStyle/>
           <a:p>
-            <a:pPr algn="ctr"/>
+            <a:pPr algn="ctr">
+              <a:defRPr/>
+            </a:pPr>
           </a:p>
         </p:txBody>
       </p:sp>
@@ -4231,7 +4257,9 @@
           <a:bodyPr rtlCol="0" anchor="ctr"/>
           <a:lstStyle/>
           <a:p>
-            <a:pPr algn="ctr"/>
+            <a:pPr algn="ctr">
+              <a:defRPr/>
+            </a:pPr>
           </a:p>
         </p:txBody>
       </p:sp>
@@ -4244,7 +4272,7 @@
         <p:spPr>
           <a:xfrm>
             <a:off x="868680" y="1143000"/>
-            <a:ext cx="2743200" cy="274320"/>
+            <a:ext cx="2743200" cy="340360"/>
           </a:xfrm>
           <a:prstGeom prst="rect">
             <a:avLst/>
@@ -4266,6 +4294,7 @@
               </a:defRPr>
             </a:pPr>
             <a:r>
+              <a:rPr/>
               <a:t>❌ カリキュラム過密</a:t>
             </a:r>
           </a:p>
@@ -4279,7 +4308,7 @@
         </p:nvSpPr>
         <p:spPr>
           <a:xfrm>
-            <a:off x="868680" y="1417319"/>
+            <a:off x="868680" y="1501648"/>
             <a:ext cx="6400800" cy="320040"/>
           </a:xfrm>
           <a:prstGeom prst="rect">
@@ -4302,6 +4331,7 @@
               </a:defRPr>
             </a:pPr>
             <a:r>
+              <a:rPr/>
               <a:t>ナラティブ教育の時間確保が困難</a:t>
             </a:r>
           </a:p>
@@ -4348,7 +4378,9 @@
           <a:bodyPr rtlCol="0" anchor="ctr"/>
           <a:lstStyle/>
           <a:p>
-            <a:pPr algn="ctr"/>
+            <a:pPr algn="ctr">
+              <a:defRPr/>
+            </a:pPr>
           </a:p>
         </p:txBody>
       </p:sp>
@@ -4391,7 +4423,9 @@
           <a:bodyPr rtlCol="0" anchor="ctr"/>
           <a:lstStyle/>
           <a:p>
-            <a:pPr algn="ctr"/>
+            <a:pPr algn="ctr">
+              <a:defRPr/>
+            </a:pPr>
           </a:p>
         </p:txBody>
       </p:sp>
@@ -4404,7 +4438,7 @@
         <p:spPr>
           <a:xfrm>
             <a:off x="868680" y="1920239"/>
-            <a:ext cx="2743200" cy="274320"/>
+            <a:ext cx="2743200" cy="340360"/>
           </a:xfrm>
           <a:prstGeom prst="rect">
             <a:avLst/>
@@ -4426,6 +4460,7 @@
               </a:defRPr>
             </a:pPr>
             <a:r>
+              <a:rPr/>
               <a:t>❌ 教員の準備不足</a:t>
             </a:r>
           </a:p>
@@ -4439,7 +4474,7 @@
         </p:nvSpPr>
         <p:spPr>
           <a:xfrm>
-            <a:off x="868680" y="2194560"/>
+            <a:off x="868680" y="2278887"/>
             <a:ext cx="6400800" cy="320040"/>
           </a:xfrm>
           <a:prstGeom prst="rect">
@@ -4462,6 +4497,7 @@
               </a:defRPr>
             </a:pPr>
             <a:r>
+              <a:rPr/>
               <a:t>ナラティブを教えるトレーニングが未体系化</a:t>
             </a:r>
           </a:p>
@@ -4508,7 +4544,9 @@
           <a:bodyPr rtlCol="0" anchor="ctr"/>
           <a:lstStyle/>
           <a:p>
-            <a:pPr algn="ctr"/>
+            <a:pPr algn="ctr">
+              <a:defRPr/>
+            </a:pPr>
           </a:p>
         </p:txBody>
       </p:sp>
@@ -4551,7 +4589,9 @@
           <a:bodyPr rtlCol="0" anchor="ctr"/>
           <a:lstStyle/>
           <a:p>
-            <a:pPr algn="ctr"/>
+            <a:pPr algn="ctr">
+              <a:defRPr/>
+            </a:pPr>
           </a:p>
         </p:txBody>
       </p:sp>
@@ -4564,7 +4604,7 @@
         <p:spPr>
           <a:xfrm>
             <a:off x="868680" y="2697479"/>
-            <a:ext cx="2743200" cy="274320"/>
+            <a:ext cx="2743200" cy="340360"/>
           </a:xfrm>
           <a:prstGeom prst="rect">
             <a:avLst/>
@@ -4586,6 +4626,7 @@
               </a:defRPr>
             </a:pPr>
             <a:r>
+              <a:rPr/>
               <a:t>❌ 評価方法の不整合</a:t>
             </a:r>
           </a:p>
@@ -4599,7 +4640,7 @@
         </p:nvSpPr>
         <p:spPr>
           <a:xfrm>
-            <a:off x="868680" y="2971800"/>
+            <a:off x="868680" y="3056127"/>
             <a:ext cx="6400800" cy="320040"/>
           </a:xfrm>
           <a:prstGeom prst="rect">
@@ -4622,6 +4663,7 @@
               </a:defRPr>
             </a:pPr>
             <a:r>
+              <a:rPr/>
               <a:t>ナラティブ能力をどう測定するか未解決</a:t>
             </a:r>
           </a:p>
@@ -4668,7 +4710,9 @@
           <a:bodyPr rtlCol="0" anchor="ctr"/>
           <a:lstStyle/>
           <a:p>
-            <a:pPr algn="ctr"/>
+            <a:pPr algn="ctr">
+              <a:defRPr/>
+            </a:pPr>
           </a:p>
         </p:txBody>
       </p:sp>
@@ -4711,7 +4755,9 @@
           <a:bodyPr rtlCol="0" anchor="ctr"/>
           <a:lstStyle/>
           <a:p>
-            <a:pPr algn="ctr"/>
+            <a:pPr algn="ctr">
+              <a:defRPr/>
+            </a:pPr>
           </a:p>
         </p:txBody>
       </p:sp>
@@ -4724,7 +4770,7 @@
         <p:spPr>
           <a:xfrm>
             <a:off x="868680" y="3474720"/>
-            <a:ext cx="2743200" cy="274320"/>
+            <a:ext cx="2743200" cy="340360"/>
           </a:xfrm>
           <a:prstGeom prst="rect">
             <a:avLst/>
@@ -4746,6 +4792,7 @@
               </a:defRPr>
             </a:pPr>
             <a:r>
+              <a:rPr/>
               <a:t>❌ 長期アウトカム研究の不足</a:t>
             </a:r>
           </a:p>
@@ -4759,7 +4806,7 @@
         </p:nvSpPr>
         <p:spPr>
           <a:xfrm>
-            <a:off x="868680" y="3749039"/>
+            <a:off x="868680" y="3833368"/>
             <a:ext cx="6400800" cy="320040"/>
           </a:xfrm>
           <a:prstGeom prst="rect">
@@ -4782,6 +4829,7 @@
               </a:defRPr>
             </a:pPr>
             <a:r>
+              <a:rPr/>
               <a:t>ケアの質・燃え尽き防止への効果が未検証</a:t>
             </a:r>
           </a:p>
@@ -4818,6 +4866,7 @@
               </a:defRPr>
             </a:pPr>
             <a:r>
+              <a:rPr/>
               <a:t>構造的な障壁を無視すると形骸化する — システム思考で「レバレッジポイント」を見極めよう</a:t>
             </a:r>
           </a:p>
@@ -4858,7 +4907,7 @@
         <p:spPr>
           <a:xfrm>
             <a:off x="731520" y="274320"/>
-            <a:ext cx="7315200" cy="457200"/>
+            <a:ext cx="7315200" cy="518159"/>
           </a:xfrm>
           <a:prstGeom prst="rect">
             <a:avLst/>
@@ -4880,6 +4929,7 @@
               </a:defRPr>
             </a:pPr>
             <a:r>
+              <a:rPr/>
               <a:t>デジタル・ナラティブ・メディスンの登場</a:t>
             </a:r>
           </a:p>
@@ -4893,8 +4943,8 @@
         </p:nvSpPr>
         <p:spPr>
           <a:xfrm>
-            <a:off x="731520" y="731520"/>
-            <a:ext cx="5486400" cy="274320"/>
+            <a:off x="731520" y="810767"/>
+            <a:ext cx="5486400" cy="304799"/>
           </a:xfrm>
           <a:prstGeom prst="rect">
             <a:avLst/>
@@ -4916,6 +4966,7 @@
               </a:defRPr>
             </a:pPr>
             <a:r>
+              <a:rPr/>
               <a:t>JMIR, 2026 — デジタルがナラティブを拡張する3つの方向</a:t>
             </a:r>
           </a:p>
@@ -4962,7 +5013,9 @@
           <a:bodyPr rtlCol="0" anchor="ctr"/>
           <a:lstStyle/>
           <a:p>
-            <a:pPr algn="ctr"/>
+            <a:pPr algn="ctr">
+              <a:defRPr/>
+            </a:pPr>
           </a:p>
         </p:txBody>
       </p:sp>
@@ -5005,7 +5058,9 @@
           <a:bodyPr rtlCol="0" anchor="ctr"/>
           <a:lstStyle/>
           <a:p>
-            <a:pPr algn="ctr"/>
+            <a:pPr algn="ctr">
+              <a:defRPr/>
+            </a:pPr>
           </a:p>
         </p:txBody>
       </p:sp>
@@ -5040,10 +5095,12 @@
               </a:defRPr>
             </a:pPr>
             <a:r>
+              <a:rPr/>
               <a:t>患者</a:t>
             </a:r>
             <a:br/>
             <a:r>
+              <a:rPr/>
               <a:t>エンパワーメント</a:t>
             </a:r>
           </a:p>
@@ -5057,7 +5114,7 @@
         </p:nvSpPr>
         <p:spPr>
           <a:xfrm>
-            <a:off x="868680" y="1783080"/>
+            <a:off x="868680" y="1801368"/>
             <a:ext cx="2286000" cy="1188720"/>
           </a:xfrm>
           <a:prstGeom prst="rect">
@@ -5080,14 +5137,17 @@
               </a:defRPr>
             </a:pPr>
             <a:r>
+              <a:rPr/>
               <a:t>共同設計（co-design）</a:t>
             </a:r>
             <a:br/>
             <a:r>
+              <a:rPr/>
               <a:t>患者参加型ケア</a:t>
             </a:r>
             <a:br/>
             <a:r>
+              <a:rPr/>
               <a:t>アドボカシー</a:t>
             </a:r>
           </a:p>
@@ -5134,7 +5194,9 @@
           <a:bodyPr rtlCol="0" anchor="ctr"/>
           <a:lstStyle/>
           <a:p>
-            <a:pPr algn="ctr"/>
+            <a:pPr algn="ctr">
+              <a:defRPr/>
+            </a:pPr>
           </a:p>
         </p:txBody>
       </p:sp>
@@ -5177,7 +5239,9 @@
           <a:bodyPr rtlCol="0" anchor="ctr"/>
           <a:lstStyle/>
           <a:p>
-            <a:pPr algn="ctr"/>
+            <a:pPr algn="ctr">
+              <a:defRPr/>
+            </a:pPr>
           </a:p>
         </p:txBody>
       </p:sp>
@@ -5212,10 +5276,12 @@
               </a:defRPr>
             </a:pPr>
             <a:r>
+              <a:rPr/>
               <a:t>ケアチームの</a:t>
             </a:r>
             <a:br/>
             <a:r>
+              <a:rPr/>
               <a:t>人間化</a:t>
             </a:r>
           </a:p>
@@ -5229,7 +5295,7 @@
         </p:nvSpPr>
         <p:spPr>
           <a:xfrm>
-            <a:off x="3657599" y="1783080"/>
+            <a:off x="3657599" y="1801368"/>
             <a:ext cx="2286000" cy="1188720"/>
           </a:xfrm>
           <a:prstGeom prst="rect">
@@ -5252,14 +5318,17 @@
               </a:defRPr>
             </a:pPr>
             <a:r>
+              <a:rPr/>
               <a:t>物語のデジタル可視化</a:t>
             </a:r>
             <a:br/>
             <a:r>
+              <a:rPr/>
               <a:t>カルテを超えた記録</a:t>
             </a:r>
             <a:br/>
             <a:r>
+              <a:rPr/>
               <a:t>人間化の架け橋</a:t>
             </a:r>
           </a:p>
@@ -5306,7 +5375,9 @@
           <a:bodyPr rtlCol="0" anchor="ctr"/>
           <a:lstStyle/>
           <a:p>
-            <a:pPr algn="ctr"/>
+            <a:pPr algn="ctr">
+              <a:defRPr/>
+            </a:pPr>
           </a:p>
         </p:txBody>
       </p:sp>
@@ -5349,7 +5420,9 @@
           <a:bodyPr rtlCol="0" anchor="ctr"/>
           <a:lstStyle/>
           <a:p>
-            <a:pPr algn="ctr"/>
+            <a:pPr algn="ctr">
+              <a:defRPr/>
+            </a:pPr>
           </a:p>
         </p:txBody>
       </p:sp>
@@ -5384,6 +5457,7 @@
               </a:defRPr>
             </a:pPr>
             <a:r>
+              <a:rPr/>
               <a:t>教育への応用</a:t>
             </a:r>
           </a:p>
@@ -5397,7 +5471,7 @@
         </p:nvSpPr>
         <p:spPr>
           <a:xfrm>
-            <a:off x="6446520" y="1783080"/>
+            <a:off x="6446520" y="1801368"/>
             <a:ext cx="2286000" cy="1188720"/>
           </a:xfrm>
           <a:prstGeom prst="rect">
@@ -5420,14 +5494,17 @@
               </a:defRPr>
             </a:pPr>
             <a:r>
+              <a:rPr/>
               <a:t>AI構造化分析</a:t>
             </a:r>
             <a:br/>
             <a:r>
+              <a:rPr/>
               <a:t>共感教育の支援</a:t>
             </a:r>
             <a:br/>
             <a:r>
+              <a:rPr/>
               <a:t>臨床推論との統合</a:t>
             </a:r>
           </a:p>
@@ -5464,6 +5541,7 @@
               </a:defRPr>
             </a:pPr>
             <a:r>
+              <a:rPr/>
               <a:t>限界: デジタルデバイド ｜ プライバシー ｜ 構造化が物語の豊かさを損なうリスク</a:t>
             </a:r>
           </a:p>
@@ -5504,7 +5582,7 @@
         <p:spPr>
           <a:xfrm>
             <a:off x="731520" y="274320"/>
-            <a:ext cx="7315200" cy="457200"/>
+            <a:ext cx="7315200" cy="518159"/>
           </a:xfrm>
           <a:prstGeom prst="rect">
             <a:avLst/>
@@ -5526,6 +5604,7 @@
               </a:defRPr>
             </a:pPr>
             <a:r>
+              <a:rPr/>
               <a:t>ナラティブ x 臨床思考の統合</a:t>
             </a:r>
           </a:p>
@@ -5539,8 +5618,8 @@
         </p:nvSpPr>
         <p:spPr>
           <a:xfrm>
-            <a:off x="731520" y="731520"/>
-            <a:ext cx="4572000" cy="274320"/>
+            <a:off x="731520" y="810767"/>
+            <a:ext cx="4572000" cy="304799"/>
           </a:xfrm>
           <a:prstGeom prst="rect">
             <a:avLst/>
@@ -5562,6 +5641,7 @@
               </a:defRPr>
             </a:pPr>
             <a:r>
+              <a:rPr/>
               <a:t>BMC Medical Education, 2025 — 神経内科での実証</a:t>
             </a:r>
           </a:p>
@@ -5834,7 +5914,9 @@
           <a:bodyPr rtlCol="0" anchor="ctr"/>
           <a:lstStyle/>
           <a:p>
-            <a:pPr algn="ctr"/>
+            <a:pPr algn="ctr">
+              <a:defRPr/>
+            </a:pPr>
           </a:p>
         </p:txBody>
       </p:sp>
@@ -5847,7 +5929,7 @@
         <p:spPr>
           <a:xfrm>
             <a:off x="5074920" y="1143000"/>
-            <a:ext cx="3383280" cy="274320"/>
+            <a:ext cx="3383280" cy="287020"/>
           </a:xfrm>
           <a:prstGeom prst="rect">
             <a:avLst/>
@@ -5869,6 +5951,7 @@
               </a:defRPr>
             </a:pPr>
             <a:r>
+              <a:rPr/>
               <a:t>統合モデル概念図</a:t>
             </a:r>
           </a:p>
@@ -5882,7 +5965,7 @@
         </p:nvSpPr>
         <p:spPr>
           <a:xfrm>
-            <a:off x="5074920" y="1417320"/>
+            <a:off x="5074920" y="1448308"/>
             <a:ext cx="3383280" cy="1828800"/>
           </a:xfrm>
           <a:prstGeom prst="rect">
@@ -5905,30 +5988,37 @@
               </a:defRPr>
             </a:pPr>
             <a:r>
+              <a:rPr/>
               <a:t>患者の物語</a:t>
             </a:r>
             <a:br/>
             <a:r>
+              <a:rPr/>
               <a:t>  ↓ Attention</a:t>
             </a:r>
             <a:br/>
             <a:r>
+              <a:rPr/>
               <a:t>物語の構造化</a:t>
             </a:r>
             <a:br/>
             <a:r>
+              <a:rPr/>
               <a:t>  ↓ 臨床思考モデル適用</a:t>
             </a:r>
             <a:br/>
             <a:r>
+              <a:rPr/>
               <a:t>仮説生成 ←→ パターン認識</a:t>
             </a:r>
             <a:br/>
             <a:r>
+              <a:rPr/>
               <a:t>  ↓ Affiliation</a:t>
             </a:r>
             <a:br/>
             <a:r>
+              <a:rPr/>
               <a:t>統合的臨床判断</a:t>
             </a:r>
           </a:p>
@@ -5943,7 +6033,7 @@
         <p:spPr>
           <a:xfrm>
             <a:off x="731520" y="3474720"/>
-            <a:ext cx="2743200" cy="274320"/>
+            <a:ext cx="2743200" cy="304799"/>
           </a:xfrm>
           <a:prstGeom prst="rect">
             <a:avLst/>
@@ -5965,6 +6055,7 @@
               </a:defRPr>
             </a:pPr>
             <a:r>
+              <a:rPr/>
               <a:t>批判的吟味</a:t>
             </a:r>
           </a:p>
@@ -5978,7 +6069,7 @@
         </p:nvSpPr>
         <p:spPr>
           <a:xfrm>
-            <a:off x="731520" y="3749039"/>
+            <a:off x="731520" y="3797806"/>
             <a:ext cx="7680960" cy="1097280"/>
           </a:xfrm>
           <a:prstGeom prst="rect">
@@ -6002,6 +6093,7 @@
               <a:buChar char="●"/>
             </a:pPr>
             <a:r>
+              <a:rPr/>
               <a:t>Study Design: 単施設、サンプルサイズは？</a:t>
             </a:r>
           </a:p>
@@ -6016,6 +6108,7 @@
               <a:buChar char="●"/>
             </a:pPr>
             <a:r>
+              <a:rPr/>
               <a:t>「高い学習成果」の測定方法は適切か？</a:t>
             </a:r>
           </a:p>
@@ -6030,6 +6123,7 @@
               <a:buChar char="●"/>
             </a:pPr>
             <a:r>
+              <a:rPr/>
               <a:t>一般化可能性と教育者効果の交絡は？</a:t>
             </a:r>
           </a:p>
@@ -6070,7 +6164,7 @@
         <p:spPr>
           <a:xfrm>
             <a:off x="731520" y="274320"/>
-            <a:ext cx="7315200" cy="457200"/>
+            <a:ext cx="7315200" cy="589279"/>
           </a:xfrm>
           <a:prstGeom prst="rect">
             <a:avLst/>
@@ -6092,6 +6186,7 @@
               </a:defRPr>
             </a:pPr>
             <a:r>
+              <a:rPr/>
               <a:t>ペアディスカッション</a:t>
             </a:r>
           </a:p>
@@ -6105,8 +6200,8 @@
         </p:nvSpPr>
         <p:spPr>
           <a:xfrm>
-            <a:off x="731520" y="731520"/>
-            <a:ext cx="2743200" cy="320040"/>
+            <a:off x="731520" y="881887"/>
+            <a:ext cx="2743200" cy="340360"/>
           </a:xfrm>
           <a:prstGeom prst="rect">
             <a:avLst/>
@@ -6128,6 +6223,7 @@
               </a:defRPr>
             </a:pPr>
             <a:r>
+              <a:rPr/>
               <a:t>4分間 → 全体共有 2分</a:t>
             </a:r>
           </a:p>
@@ -6172,7 +6268,9 @@
           <a:bodyPr rtlCol="0" anchor="ctr"/>
           <a:lstStyle/>
           <a:p>
-            <a:pPr algn="ctr"/>
+            <a:pPr algn="ctr">
+              <a:defRPr/>
+            </a:pPr>
           </a:p>
         </p:txBody>
       </p:sp>
@@ -6217,7 +6315,9 @@
           <a:bodyPr rtlCol="0" anchor="ctr"/>
           <a:lstStyle/>
           <a:p>
-            <a:pPr algn="ctr"/>
+            <a:pPr algn="ctr">
+              <a:defRPr/>
+            </a:pPr>
           </a:p>
         </p:txBody>
       </p:sp>
@@ -6252,14 +6352,17 @@
               </a:defRPr>
             </a:pPr>
             <a:r>
+              <a:rPr/>
               <a:t>あなたの臨床現場で、ナラティブ x 臨床思考 x</a:t>
             </a:r>
             <a:br/>
             <a:r>
+              <a:rPr/>
               <a:t>デジタルツールの統合を1つ実践するとしたら、</a:t>
             </a:r>
             <a:br/>
             <a:r>
+              <a:rPr/>
               <a:t>何ができるか？</a:t>
             </a:r>
           </a:p>
@@ -6274,7 +6377,7 @@
         <p:spPr>
           <a:xfrm>
             <a:off x="731520" y="2468880"/>
-            <a:ext cx="2743200" cy="274320"/>
+            <a:ext cx="2743200" cy="340360"/>
           </a:xfrm>
           <a:prstGeom prst="rect">
             <a:avLst/>
@@ -6296,6 +6399,7 @@
               </a:defRPr>
             </a:pPr>
             <a:r>
+              <a:rPr/>
               <a:t>考えるヒント</a:t>
             </a:r>
           </a:p>
@@ -6309,7 +6413,7 @@
         </p:nvSpPr>
         <p:spPr>
           <a:xfrm>
-            <a:off x="731520" y="2788920"/>
+            <a:off x="731520" y="2827528"/>
             <a:ext cx="7680960" cy="1645920"/>
           </a:xfrm>
           <a:prstGeom prst="rect">
@@ -6333,6 +6437,7 @@
               <a:buChar char="●"/>
             </a:pPr>
             <a:r>
+              <a:rPr/>
               <a:t>外来の問診にナラティブの要素を1つ追加するなら？</a:t>
             </a:r>
           </a:p>
@@ -6347,6 +6452,7 @@
               <a:buChar char="●"/>
             </a:pPr>
             <a:r>
+              <a:rPr/>
               <a:t>カンファレンスで「患者の物語」を構造的に共有する方法は？</a:t>
             </a:r>
           </a:p>
@@ -6361,6 +6467,7 @@
               <a:buChar char="●"/>
             </a:pPr>
             <a:r>
+              <a:rPr/>
               <a:t>デジタルツール（音声記録、テンプレート等）をどう使えるか？</a:t>
             </a:r>
           </a:p>
@@ -6401,7 +6508,7 @@
         <p:spPr>
           <a:xfrm>
             <a:off x="731520" y="274320"/>
-            <a:ext cx="7315200" cy="457200"/>
+            <a:ext cx="7315200" cy="518159"/>
           </a:xfrm>
           <a:prstGeom prst="rect">
             <a:avLst/>
@@ -6423,6 +6530,7 @@
               </a:defRPr>
             </a:pPr>
             <a:r>
+              <a:rPr/>
               <a:t>3つの論文が示す全体像</a:t>
             </a:r>
           </a:p>
@@ -6760,7 +6868,7 @@
         <p:spPr>
           <a:xfrm>
             <a:off x="731520" y="2194560"/>
-            <a:ext cx="4572000" cy="320040"/>
+            <a:ext cx="4572000" cy="340360"/>
           </a:xfrm>
           <a:prstGeom prst="rect">
             <a:avLst/>
@@ -6782,6 +6890,7 @@
               </a:defRPr>
             </a:pPr>
             <a:r>
+              <a:rPr/>
               <a:t>来週までの1アクション（1つ選ぼう）</a:t>
             </a:r>
           </a:p>
@@ -6819,6 +6928,7 @@
               <a:buChar char="●"/>
             </a:pPr>
             <a:r>
+              <a:rPr/>
               <a:t>患者の語りに3分間、中断せず耳を傾けてみる</a:t>
             </a:r>
           </a:p>
@@ -6833,6 +6943,7 @@
               <a:buChar char="●"/>
             </a:pPr>
             <a:r>
+              <a:rPr/>
               <a:t>カルテ「現病歴」に患者の言葉を1文そのまま記載</a:t>
             </a:r>
           </a:p>
@@ -6847,6 +6958,7 @@
               <a:buChar char="●"/>
             </a:pPr>
             <a:r>
+              <a:rPr/>
               <a:t>同僚と「心に残った患者の物語」を1つ共有</a:t>
             </a:r>
           </a:p>
@@ -6891,7 +7003,9 @@
           <a:bodyPr rtlCol="0" anchor="ctr"/>
           <a:lstStyle/>
           <a:p>
-            <a:pPr algn="ctr"/>
+            <a:pPr algn="ctr">
+              <a:defRPr/>
+            </a:pPr>
           </a:p>
         </p:txBody>
       </p:sp>
@@ -6926,14 +7040,17 @@
               </a:defRPr>
             </a:pPr>
             <a:r>
+              <a:rPr/>
               <a:t>持ち帰りの問い: デジタルツールが「記録」を便利にする一方で、</a:t>
             </a:r>
             <a:br/>
             <a:r>
+              <a:rPr/>
               <a:t>聴く力そのものはテクノロジーでは代替できない。</a:t>
             </a:r>
             <a:br/>
             <a:r>
+              <a:rPr/>
               <a:t>デジタル時代に「聴く力」をどう育むか？</a:t>
             </a:r>
           </a:p>
